--- a/scenarios/S09_kaist_case_study/deliverables/Tesla_Zara_발표_덱.pptx
+++ b/scenarios/S09_kaist_case_study/deliverables/Tesla_Zara_발표_덱.pptx
@@ -13,6 +13,7 @@
     <p:sldId id="261" r:id="rId12"/>
     <p:sldId id="262" r:id="rId13"/>
     <p:sldId id="263" r:id="rId14"/>
+    <p:sldId id="264" r:id="rId15"/>
   </p:sldIdLst>
   <p:sldSz cx="9144000" cy="6858000" type="screen4x3"/>
   <p:notesSz cx="6858000" cy="9144000"/>
@@ -3628,6 +3629,82 @@
           <a:p>
             <a:r>
               <a:t>추가 자료 요청 안내</a:t>
+            </a:r>
+          </a:p>
+        </p:txBody>
+      </p:sp>
+    </p:spTree>
+  </p:cSld>
+  <p:clrMapOvr>
+    <a:masterClrMapping/>
+  </p:clrMapOvr>
+</p:sld>
+</file>
+
+<file path=ppt/slides/slide9.xml><?xml version="1.0" encoding="utf-8"?>
+<p:sld xmlns:a="http://schemas.openxmlformats.org/drawingml/2006/main" xmlns:p="http://schemas.openxmlformats.org/presentationml/2006/main" xmlns:r="http://schemas.openxmlformats.org/officeDocument/2006/relationships">
+  <p:cSld>
+    <p:spTree>
+      <p:nvGrpSpPr>
+        <p:cNvPr id="1" name=""/>
+        <p:cNvGrpSpPr/>
+        <p:nvPr/>
+      </p:nvGrpSpPr>
+      <p:grpSpPr/>
+      <p:sp>
+        <p:nvSpPr>
+          <p:cNvPr id="2" name="Title 1"/>
+          <p:cNvSpPr>
+            <a:spLocks noGrp="1"/>
+          </p:cNvSpPr>
+          <p:nvPr>
+            <p:ph type="title"/>
+          </p:nvPr>
+        </p:nvSpPr>
+        <p:spPr/>
+        <p:txBody>
+          <a:bodyPr/>
+          <a:lstStyle/>
+          <a:p>
+            <a:r>
+              <a:t>변경 이력 · Tesla·Zara 공급망 및 수요예측 비교</a:t>
+            </a:r>
+          </a:p>
+        </p:txBody>
+      </p:sp>
+      <p:sp>
+        <p:nvSpPr>
+          <p:cNvPr id="3" name="Content Placeholder 2"/>
+          <p:cNvSpPr>
+            <a:spLocks noGrp="1"/>
+          </p:cNvSpPr>
+          <p:nvPr>
+            <p:ph idx="1"/>
+          </p:nvPr>
+        </p:nvSpPr>
+        <p:spPr/>
+        <p:txBody>
+          <a:bodyPr/>
+          <a:lstStyle/>
+          <a:p>
+            <a:r>
+              <a:t>Tesla의 생산·배터리·소프트웨어 통합과 Zara의 생산·유통 통제 및 협력 네트워크를 비교</a:t>
+            </a:r>
+          </a:p>
+          <a:p>
+            <a:pPr>
+              <a:defRPr sz="1400"/>
+            </a:pPr>
+            <a:r>
+              <a:t>수요예측 방식, 예측 정확도, 시장 반응 속도, 재고 운영과 리드타임·제품 출시 영향을 비교</a:t>
+            </a:r>
+          </a:p>
+          <a:p>
+            <a:pPr>
+              <a:defRPr sz="1400"/>
+            </a:pPr>
+            <a:r>
+              <a:t>공개 자료의 기준 시점·출처 차이, 비공개 데이터, 산업 특성 차이에 따른 비교 한계를 명시</a:t>
             </a:r>
           </a:p>
         </p:txBody>

--- a/scenarios/S09_kaist_case_study/deliverables/Tesla_Zara_발표_덱.pptx
+++ b/scenarios/S09_kaist_case_study/deliverables/Tesla_Zara_발표_덱.pptx
@@ -14,6 +14,7 @@
     <p:sldId id="262" r:id="rId13"/>
     <p:sldId id="263" r:id="rId14"/>
     <p:sldId id="264" r:id="rId15"/>
+    <p:sldId id="265" r:id="rId16"/>
   </p:sldIdLst>
   <p:sldSz cx="9144000" cy="6858000" type="screen4x3"/>
   <p:notesSz cx="6858000" cy="9144000"/>
@@ -3134,6 +3135,114 @@
           <a:p>
             <a:r>
               <a:t>공급망 전략 비교분석 · 케이스스터디</a:t>
+            </a:r>
+          </a:p>
+        </p:txBody>
+      </p:sp>
+    </p:spTree>
+  </p:cSld>
+  <p:clrMapOvr>
+    <a:masterClrMapping/>
+  </p:clrMapOvr>
+</p:sld>
+</file>
+
+<file path=ppt/slides/slide10.xml><?xml version="1.0" encoding="utf-8"?>
+<p:sld xmlns:a="http://schemas.openxmlformats.org/drawingml/2006/main" xmlns:p="http://schemas.openxmlformats.org/presentationml/2006/main" xmlns:r="http://schemas.openxmlformats.org/officeDocument/2006/relationships">
+  <p:cSld>
+    <p:spTree>
+      <p:nvGrpSpPr>
+        <p:cNvPr id="1" name=""/>
+        <p:cNvGrpSpPr/>
+        <p:nvPr/>
+      </p:nvGrpSpPr>
+      <p:grpSpPr/>
+      <p:sp>
+        <p:nvSpPr>
+          <p:cNvPr id="2" name="Title 1"/>
+          <p:cNvSpPr>
+            <a:spLocks noGrp="1"/>
+          </p:cNvSpPr>
+          <p:nvPr>
+            <p:ph type="title"/>
+          </p:nvPr>
+        </p:nvSpPr>
+        <p:spPr/>
+        <p:txBody>
+          <a:bodyPr/>
+          <a:lstStyle/>
+          <a:p>
+            <a:r>
+              <a:t>변경사항 — REQ-20260725-tesla-zara-deliverable-update</a:t>
+            </a:r>
+          </a:p>
+        </p:txBody>
+      </p:sp>
+      <p:sp>
+        <p:nvSpPr>
+          <p:cNvPr id="3" name="Content Placeholder 2"/>
+          <p:cNvSpPr>
+            <a:spLocks noGrp="1"/>
+          </p:cNvSpPr>
+          <p:nvPr>
+            <p:ph idx="1"/>
+          </p:nvPr>
+        </p:nvSpPr>
+        <p:spPr/>
+        <p:txBody>
+          <a:bodyPr/>
+          <a:lstStyle/>
+          <a:p>
+            <a:r>
+              <a:t>요청자: IMMS 조교 · 결정: 승인된 비교분석 프레임과 한계·출처 기준을 관련 산출물에 반영했으며, 산출물_설계서.docx·요구사항_추적표.xlsx·보고_장표.pptx는 deliverable_patch 기반 GitHub Actions 문서엔진으로 갱신 완료한 것으로 기록한다.</a:t>
+            </a:r>
+          </a:p>
+          <a:p>
+            <a:pPr>
+              <a:defRPr sz="1400"/>
+            </a:pPr>
+            <a:r>
+              <a:t>• Tesla와 Zara의 수직계열화 수준, 핵심 활동의 내부화 범위, 외부 공급업체 의존도를 비교한다.</a:t>
+            </a:r>
+          </a:p>
+          <a:p>
+            <a:pPr>
+              <a:defRPr sz="1400"/>
+            </a:pPr>
+            <a:r>
+              <a:t>• Tesla의 생산·배터리·소프트웨어 중심 통합 방식과 Zara의 빠른 생산·유통 통제 및 협력 네트워크 방식을 대조한다.</a:t>
+            </a:r>
+          </a:p>
+          <a:p>
+            <a:pPr>
+              <a:defRPr sz="1400"/>
+            </a:pPr>
+            <a:r>
+              <a:t>• 두 기업의 수요예측 방식 차이를 분석하고 예측 정확도, 시장 반응 속도, 재고 운영과의 연계성을 비교한다.</a:t>
+            </a:r>
+          </a:p>
+          <a:p>
+            <a:pPr>
+              <a:defRPr sz="1400"/>
+            </a:pPr>
+            <a:r>
+              <a:t>• 공급망 구조와 수요예측 방식이 리드타임, 재고, 제품 출시 및 대응 속도에 미치는 영향을 분석 지표로 반영한다.</a:t>
+            </a:r>
+          </a:p>
+          <a:p>
+            <a:pPr>
+              <a:defRPr sz="1400"/>
+            </a:pPr>
+            <a:r>
+              <a:t>• 각 비교 지표에 공개자료의 기준 시점과 출처를 명시하고, 비공개 운영 데이터 및 알고리즘에 따른 정성 분석 한계를 표기한다.</a:t>
+            </a:r>
+          </a:p>
+          <a:p>
+            <a:pPr>
+              <a:defRPr sz="1400"/>
+            </a:pPr>
+            <a:r>
+              <a:t>• 산업·제품 특성 차이로 인한 단순 비교 및 일반화의 한계와 cross-module 영향을 관련 설계·추적·요약 산출물에 반영한다.</a:t>
             </a:r>
           </a:p>
         </p:txBody>

--- a/scenarios/S09_kaist_case_study/deliverables/Tesla_Zara_발표_덱.pptx
+++ b/scenarios/S09_kaist_case_study/deliverables/Tesla_Zara_발표_덱.pptx
@@ -15,6 +15,7 @@
     <p:sldId id="263" r:id="rId14"/>
     <p:sldId id="264" r:id="rId15"/>
     <p:sldId id="265" r:id="rId16"/>
+    <p:sldId id="266" r:id="rId17"/>
   </p:sldIdLst>
   <p:sldSz cx="9144000" cy="6858000" type="screen4x3"/>
   <p:notesSz cx="6858000" cy="9144000"/>
@@ -3255,6 +3256,98 @@
 </p:sld>
 </file>
 
+<file path=ppt/slides/slide11.xml><?xml version="1.0" encoding="utf-8"?>
+<p:sld xmlns:a="http://schemas.openxmlformats.org/drawingml/2006/main" xmlns:p="http://schemas.openxmlformats.org/presentationml/2006/main" xmlns:r="http://schemas.openxmlformats.org/officeDocument/2006/relationships">
+  <p:cSld>
+    <p:spTree>
+      <p:nvGrpSpPr>
+        <p:cNvPr id="1" name=""/>
+        <p:cNvGrpSpPr/>
+        <p:nvPr/>
+      </p:nvGrpSpPr>
+      <p:grpSpPr/>
+      <p:sp>
+        <p:nvSpPr>
+          <p:cNvPr id="2" name="Title 1"/>
+          <p:cNvSpPr>
+            <a:spLocks noGrp="1"/>
+          </p:cNvSpPr>
+          <p:nvPr>
+            <p:ph type="title"/>
+          </p:nvPr>
+        </p:nvSpPr>
+        <p:spPr/>
+        <p:txBody>
+          <a:bodyPr/>
+          <a:lstStyle/>
+          <a:p>
+            <a:r>
+              <a:t>변경 이력 · REQ-20260725-tesla-zara-supply-chain-demand-forecast</a:t>
+            </a:r>
+          </a:p>
+        </p:txBody>
+      </p:sp>
+      <p:sp>
+        <p:nvSpPr>
+          <p:cNvPr id="3" name="Content Placeholder 2"/>
+          <p:cNvSpPr>
+            <a:spLocks noGrp="1"/>
+          </p:cNvSpPr>
+          <p:nvPr>
+            <p:ph idx="1"/>
+          </p:nvPr>
+        </p:nvSpPr>
+        <p:spPr/>
+        <p:txBody>
+          <a:bodyPr/>
+          <a:lstStyle/>
+          <a:p>
+            <a:r>
+              <a:t>Tesla와 Zara의 수직계열화 수준, 핵심 활동 내부화 범위 및 외부 공급업체 의존도를 비교</a:t>
+            </a:r>
+          </a:p>
+          <a:p>
+            <a:pPr>
+              <a:defRPr sz="1400"/>
+            </a:pPr>
+            <a:r>
+              <a:t>Tesla의 생산·배터리·소프트웨어 통합과 Zara의 빠른 생산·유통 통제 및 협력 네트워크를 대조</a:t>
+            </a:r>
+          </a:p>
+          <a:p>
+            <a:pPr>
+              <a:defRPr sz="1400"/>
+            </a:pPr>
+            <a:r>
+              <a:t>수요예측 방식, 예측 정확도, 시장 반응 속도, 재고 운영, 리드타임 및 제품 출시·대응 속도를 지표화</a:t>
+            </a:r>
+          </a:p>
+          <a:p>
+            <a:pPr>
+              <a:defRPr sz="1400"/>
+            </a:pPr>
+            <a:r>
+              <a:t>5 Forces·VRIO와 단위경제 비교표를 추가하고 지표 정의·기준 시점·공개자료 출처를 명시</a:t>
+            </a:r>
+          </a:p>
+          <a:p>
+            <a:pPr>
+              <a:defRPr sz="1400"/>
+            </a:pPr>
+            <a:r>
+              <a:t>비공개 운영 데이터·알고리즘 및 산업·제품 특성 차이에 따른 비교 한계와 cross-module 영향을 반영</a:t>
+            </a:r>
+          </a:p>
+        </p:txBody>
+      </p:sp>
+    </p:spTree>
+  </p:cSld>
+  <p:clrMapOvr>
+    <a:masterClrMapping/>
+  </p:clrMapOvr>
+</p:sld>
+</file>
+
 <file path=ppt/slides/slide2.xml><?xml version="1.0" encoding="utf-8"?>
 <p:sld xmlns:a="http://schemas.openxmlformats.org/drawingml/2006/main" xmlns:p="http://schemas.openxmlformats.org/presentationml/2006/main" xmlns:r="http://schemas.openxmlformats.org/officeDocument/2006/relationships">
   <p:cSld>
@@ -3597,7 +3690,7 @@
           <a:lstStyle/>
           <a:p>
             <a:r>
-              <a:t>산업특성/투자규모/리드타임/리스크</a:t>
+              <a:t>수직계열화·내부화·외부 의존도/수요예측 정확도·시장 반응 속도/재고·리드타임·출시 대응 속도/5 Forces·VRIO</a:t>
             </a:r>
           </a:p>
           <a:p>

--- a/scenarios/S09_kaist_case_study/deliverables/Tesla_Zara_발표_덱.pptx
+++ b/scenarios/S09_kaist_case_study/deliverables/Tesla_Zara_발표_덱.pptx
@@ -16,6 +16,7 @@
     <p:sldId id="264" r:id="rId15"/>
     <p:sldId id="265" r:id="rId16"/>
     <p:sldId id="266" r:id="rId17"/>
+    <p:sldId id="267" r:id="rId18"/>
   </p:sldIdLst>
   <p:sldSz cx="9144000" cy="6858000" type="screen4x3"/>
   <p:notesSz cx="6858000" cy="9144000"/>
@@ -3348,6 +3349,98 @@
 </p:sld>
 </file>
 
+<file path=ppt/slides/slide12.xml><?xml version="1.0" encoding="utf-8"?>
+<p:sld xmlns:a="http://schemas.openxmlformats.org/drawingml/2006/main" xmlns:p="http://schemas.openxmlformats.org/presentationml/2006/main" xmlns:r="http://schemas.openxmlformats.org/officeDocument/2006/relationships">
+  <p:cSld>
+    <p:spTree>
+      <p:nvGrpSpPr>
+        <p:cNvPr id="1" name=""/>
+        <p:cNvGrpSpPr/>
+        <p:nvPr/>
+      </p:nvGrpSpPr>
+      <p:grpSpPr/>
+      <p:sp>
+        <p:nvSpPr>
+          <p:cNvPr id="2" name="Title 1"/>
+          <p:cNvSpPr>
+            <a:spLocks noGrp="1"/>
+          </p:cNvSpPr>
+          <p:nvPr>
+            <p:ph type="title"/>
+          </p:nvPr>
+        </p:nvSpPr>
+        <p:spPr/>
+        <p:txBody>
+          <a:bodyPr/>
+          <a:lstStyle/>
+          <a:p>
+            <a:r>
+              <a:t>변경 이력 · REQ-20260725-tesla-zara-supply-chain-demand-forecast</a:t>
+            </a:r>
+          </a:p>
+        </p:txBody>
+      </p:sp>
+      <p:sp>
+        <p:nvSpPr>
+          <p:cNvPr id="3" name="Content Placeholder 2"/>
+          <p:cNvSpPr>
+            <a:spLocks noGrp="1"/>
+          </p:cNvSpPr>
+          <p:nvPr>
+            <p:ph idx="1"/>
+          </p:nvPr>
+        </p:nvSpPr>
+        <p:spPr/>
+        <p:txBody>
+          <a:bodyPr/>
+          <a:lstStyle/>
+          <a:p>
+            <a:r>
+              <a:t>Tesla와 Zara의 수직계열화 수준, 핵심 활동 내부화 범위 및 외부 공급업체 의존도를 비교</a:t>
+            </a:r>
+          </a:p>
+          <a:p>
+            <a:pPr>
+              <a:defRPr sz="1400"/>
+            </a:pPr>
+            <a:r>
+              <a:t>Tesla의 생산·배터리·소프트웨어 통합과 Zara의 빠른 생산·유통 통제 및 협력 네트워크를 대조</a:t>
+            </a:r>
+          </a:p>
+          <a:p>
+            <a:pPr>
+              <a:defRPr sz="1400"/>
+            </a:pPr>
+            <a:r>
+              <a:t>수요예측 방식, 예측 정확도, 시장 반응 속도, 재고 운영, 리드타임 및 제품 출시·대응 속도를 공통 지표로 반영</a:t>
+            </a:r>
+          </a:p>
+          <a:p>
+            <a:pPr>
+              <a:defRPr sz="1400"/>
+            </a:pPr>
+            <a:r>
+              <a:t>5 Forces·VRIO와 단위경제 비교표에 지표 정의·동등성 기준·기준 시점·공개자료 출처·근거 수준을 명시</a:t>
+            </a:r>
+          </a:p>
+          <a:p>
+            <a:pPr>
+              <a:defRPr sz="1400"/>
+            </a:pPr>
+            <a:r>
+              <a:t>비공개 운영 데이터·알고리즘 및 산업·제품 특성 차이에 따른 비교 한계, 경영진 메시지의 한계 고지와 컴플라이언스 검토를 반영</a:t>
+            </a:r>
+          </a:p>
+        </p:txBody>
+      </p:sp>
+    </p:spTree>
+  </p:cSld>
+  <p:clrMapOvr>
+    <a:masterClrMapping/>
+  </p:clrMapOvr>
+</p:sld>
+</file>
+
 <file path=ppt/slides/slide2.xml><?xml version="1.0" encoding="utf-8"?>
 <p:sld xmlns:a="http://schemas.openxmlformats.org/drawingml/2006/main" xmlns:p="http://schemas.openxmlformats.org/presentationml/2006/main" xmlns:r="http://schemas.openxmlformats.org/officeDocument/2006/relationships">
   <p:cSld>
@@ -3906,7 +3999,7 @@
               <a:defRPr sz="1400"/>
             </a:pPr>
             <a:r>
-              <a:t>공개 자료의 기준 시점·출처 차이, 비공개 데이터, 산업 특성 차이에 따른 비교 한계를 명시</a:t>
+              <a:t>공개 자료의 기준 시점·출처·근거 수준 차이, 비공개 데이터·알고리즘, 산업·제품 특성 차이에 따른 비교·일반화 한계를 명시하고 경영진 메시지는 컴플라이언스 검토를 거친다.</a:t>
             </a:r>
           </a:p>
         </p:txBody>

--- a/scenarios/S09_kaist_case_study/deliverables/Tesla_Zara_발표_덱.pptx
+++ b/scenarios/S09_kaist_case_study/deliverables/Tesla_Zara_발표_덱.pptx
@@ -17,6 +17,7 @@
     <p:sldId id="265" r:id="rId16"/>
     <p:sldId id="266" r:id="rId17"/>
     <p:sldId id="267" r:id="rId18"/>
+    <p:sldId id="268" r:id="rId19"/>
   </p:sldIdLst>
   <p:sldSz cx="9144000" cy="6858000" type="screen4x3"/>
   <p:notesSz cx="6858000" cy="9144000"/>
@@ -3428,7 +3429,107 @@
               <a:defRPr sz="1400"/>
             </a:pPr>
             <a:r>
-              <a:t>비공개 운영 데이터·알고리즘 및 산업·제품 특성 차이에 따른 비교 한계, 경영진 메시지의 한계 고지와 컴플라이언스 검토를 반영</a:t>
+              <a:t>비공개 운영 데이터·알고리즘 및 산업·제품 특성 차이에 따른 비교·일반화 한계, 지표 정의·기준 시점·공개자료 출처·근거 수준, 경영진 메시지의 한계 고지와 컴플라이언스 검토를 반영하고 추적 ID REQ-20260725-tesla-zara-deliverable-approval를 기록</a:t>
+            </a:r>
+          </a:p>
+        </p:txBody>
+      </p:sp>
+    </p:spTree>
+  </p:cSld>
+  <p:clrMapOvr>
+    <a:masterClrMapping/>
+  </p:clrMapOvr>
+</p:sld>
+</file>
+
+<file path=ppt/slides/slide13.xml><?xml version="1.0" encoding="utf-8"?>
+<p:sld xmlns:a="http://schemas.openxmlformats.org/drawingml/2006/main" xmlns:p="http://schemas.openxmlformats.org/presentationml/2006/main" xmlns:r="http://schemas.openxmlformats.org/officeDocument/2006/relationships">
+  <p:cSld>
+    <p:spTree>
+      <p:nvGrpSpPr>
+        <p:cNvPr id="1" name=""/>
+        <p:cNvGrpSpPr/>
+        <p:nvPr/>
+      </p:nvGrpSpPr>
+      <p:grpSpPr/>
+      <p:sp>
+        <p:nvSpPr>
+          <p:cNvPr id="2" name="Title 1"/>
+          <p:cNvSpPr>
+            <a:spLocks noGrp="1"/>
+          </p:cNvSpPr>
+          <p:nvPr>
+            <p:ph type="title"/>
+          </p:nvPr>
+        </p:nvSpPr>
+        <p:spPr/>
+        <p:txBody>
+          <a:bodyPr/>
+          <a:lstStyle/>
+          <a:p>
+            <a:r>
+              <a:t>변경 이력 · REQ-20260725-tesla-zara-deliverable-approval</a:t>
+            </a:r>
+          </a:p>
+        </p:txBody>
+      </p:sp>
+      <p:sp>
+        <p:nvSpPr>
+          <p:cNvPr id="3" name="Content Placeholder 2"/>
+          <p:cNvSpPr>
+            <a:spLocks noGrp="1"/>
+          </p:cNvSpPr>
+          <p:nvPr>
+            <p:ph idx="1"/>
+          </p:nvPr>
+        </p:nvSpPr>
+        <p:spPr/>
+        <p:txBody>
+          <a:bodyPr/>
+          <a:lstStyle/>
+          <a:p>
+            <a:r>
+              <a:t>Tesla와 Zara의 수직계열화 수준, 핵심 활동 내부화 범위 및 외부 공급업체 의존도를 비교</a:t>
+            </a:r>
+          </a:p>
+          <a:p>
+            <a:pPr>
+              <a:defRPr sz="1400"/>
+            </a:pPr>
+            <a:r>
+              <a:t>Tesla의 생산·배터리·소프트웨어 통합과 Zara의 빠른 생산·유통 통제 및 협력 네트워크를 대조</a:t>
+            </a:r>
+          </a:p>
+          <a:p>
+            <a:pPr>
+              <a:defRPr sz="1400"/>
+            </a:pPr>
+            <a:r>
+              <a:t>수요예측 방식, 예측 정확도, 시장 반응 속도, 재고, 리드타임 및 제품 출시·대응 속도를 공통 지표로 반영</a:t>
+            </a:r>
+          </a:p>
+          <a:p>
+            <a:pPr>
+              <a:defRPr sz="1400"/>
+            </a:pPr>
+            <a:r>
+              <a:t>5 Forces·VRIO를 적용하고 지표 정의·기준 시점·공개자료 출처·근거 수준을 명시</a:t>
+            </a:r>
+          </a:p>
+          <a:p>
+            <a:pPr>
+              <a:defRPr sz="1400"/>
+            </a:pPr>
+            <a:r>
+              <a:t>비공개 운영 데이터·알고리즘 및 산업·제품 특성 차이에 따른 비교·일반화 한계와 컴플라이언스 고지를 유지</a:t>
+            </a:r>
+          </a:p>
+          <a:p>
+            <a:pPr>
+              <a:defRPr sz="1400"/>
+            </a:pPr>
+            <a:r>
+              <a:t>설계서·요구사항 추적표·보고 장표 및 cross-module 변경 범위·영향 관계·추적 ID를 갱신</a:t>
             </a:r>
           </a:p>
         </p:txBody>
